--- a/firmgrid/documents/The Broke Three_FirmGrid_Slides.pptx
+++ b/firmgrid/documents/The Broke Three_FirmGrid_Slides.pptx
@@ -371,8 +371,54 @@
           <a:bodyPr/>
           <a:lstStyle/>
           <a:p>
-            <a:r>
-              <a:t>PROBLEM (30s). Three figures: 19 GW of solar that gets cut feeder-wide; 450k motorbikes electrifying into the evening peak; data-centre demand doubling with a green mandate. Root cause in one line: the operator is blind, so the cut is blunt — it's an intelligence gap, not a hardware gap. And the surplus cap just doubled a week before this pitch: more pressure, still no allocator.</a:t>
+            <a:pPr marL="0" marR="0" lvl="0" indent="0" algn="l" defTabSz="914400" rtl="0" eaLnBrk="1" fontAlgn="auto" latinLnBrk="0" hangingPunct="1">
+              <a:lnSpc>
+                <a:spcPct val="100000"/>
+              </a:lnSpc>
+              <a:spcBef>
+                <a:spcPts val="0"/>
+              </a:spcBef>
+              <a:spcAft>
+                <a:spcPts val="0"/>
+              </a:spcAft>
+              <a:buClrTx/>
+              <a:buSzTx/>
+              <a:buFontTx/>
+              <a:buNone/>
+              <a:tabLst/>
+              <a:defRPr/>
+            </a:pPr>
+            <a:r>
+              <a:rPr dirty="0"/>
+              <a:t>PROBLEM (30s). Three figures: 19 GW </a:t>
+            </a:r>
+            <a:r>
+              <a:rPr lang="en-US" dirty="0"/>
+              <a:t>(</a:t>
+            </a:r>
+            <a:r>
+              <a:rPr lang="en-VN" sz="1200" b="0" kern="1200" dirty="0">
+                <a:solidFill>
+                  <a:schemeClr val="tx1"/>
+                </a:solidFill>
+                <a:effectLst/>
+                <a:latin typeface="+mn-lt"/>
+                <a:ea typeface="+mn-ea"/>
+                <a:cs typeface="+mn-cs"/>
+              </a:rPr>
+              <a:t>a year's power for ~10 million homes) </a:t>
+            </a:r>
+            <a:r>
+              <a:rPr dirty="0"/>
+              <a:t>of solar that gets cut feeder-wide; 450k motorbikes electrifying into the evening peak; data-</a:t>
+            </a:r>
+            <a:r>
+              <a:rPr dirty="0" err="1"/>
+              <a:t>centre</a:t>
+            </a:r>
+            <a:r>
+              <a:rPr dirty="0"/>
+              <a:t> demand doubling with a green mandate. Root cause in one line: the operator is blind, so the cut is blunt — it's an intelligence gap, not a hardware gap. And the surplus cap just doubled a week before this pitch: more pressure, still no allocator.</a:t>
             </a:r>
           </a:p>
         </p:txBody>
@@ -442,7 +488,16 @@
           <a:lstStyle/>
           <a:p>
             <a:r>
-              <a:t>IMPACT (30s). Supply side: 15-19 GWh a year recovered across Hanoi's constrained transformers — 10-13 kt of CO2. Mobility side: another 16-27 kt by steering the LEZ charging wave into the solar window — one kilogram per swap, printed on the rider's receipt. Households earn real money from energy that's discarded today; EVN defers copper. And at Tier 2, the clean block undercuts the grid tariff.</a:t>
+              <a:rPr dirty="0"/>
+              <a:t>IMPACT (30s). Supply side: 15-19 GWh a year recovered across Hanoi's constrained transformers — 10-13 kt of CO2. Mobility side: another 16-27 kt</a:t>
+            </a:r>
+            <a:r>
+              <a:rPr lang="en-US" dirty="0"/>
+              <a:t> (tons of CO2 per day)</a:t>
+            </a:r>
+            <a:r>
+              <a:rPr dirty="0"/>
+              <a:t> by steering the LEZ charging wave into the solar window — one kilogram per swap, printed on the rider's receipt. Households earn real money from energy that's discarded today; EVN defers copper. And at Tier 2, the clean block undercuts the grid tariff.</a:t>
             </a:r>
           </a:p>
         </p:txBody>
@@ -690,8 +745,30 @@
           <a:lstStyle/>
           <a:p>
             <a:r>
-              <a:t>WHY NOW (20s). Four dates: the LEZ went live this week; the surplus cap doubled last week; the localisation law is pulling data centres onshore with a green mandate; and nothing firm arrives before 2030-35. The window is now — and every sunny day that passes, the wasted energy is gone forever.</a:t>
-            </a:r>
+              <a:rPr dirty="0"/>
+              <a:t>WHY NOW (20s). Four dates: the LEZ went live this week; the surplus cap doubled last week; the </a:t>
+            </a:r>
+            <a:r>
+              <a:rPr dirty="0" err="1"/>
+              <a:t>localisation</a:t>
+            </a:r>
+            <a:r>
+              <a:rPr dirty="0"/>
+              <a:t> law is pulling data </a:t>
+            </a:r>
+            <a:r>
+              <a:rPr dirty="0" err="1"/>
+              <a:t>centres</a:t>
+            </a:r>
+            <a:r>
+              <a:rPr dirty="0"/>
+              <a:t> onshore with a green mandate; and nothing firm arrives before 2030-35. The window is now — and every sunny day that passes, the wasted energy is gone forever.</a:t>
+            </a:r>
+            <a:r>
+              <a:rPr lang="en-US" dirty="0"/>
+              <a:t> We scale as the grid scale</a:t>
+            </a:r>
+            <a:endParaRPr dirty="0"/>
           </a:p>
         </p:txBody>
       </p:sp>
@@ -3975,7 +4052,7 @@
         <p:spPr>
           <a:xfrm>
             <a:off x="548640" y="3063240"/>
-            <a:ext cx="11064240" cy="548640"/>
+            <a:ext cx="11064240" cy="723275"/>
           </a:xfrm>
           <a:prstGeom prst="rect">
             <a:avLst/>
@@ -3987,21 +4064,49 @@
             <a:spAutoFit/>
           </a:bodyPr>
           <a:lstStyle/>
+          <a:p>
+            <a:pPr>
+              <a:spcAft>
+                <a:spcPts val="600"/>
+              </a:spcAft>
+            </a:pPr>
+            <a:r>
+              <a:rPr lang="en-US" sz="1800" b="1" dirty="0">
+                <a:solidFill>
+                  <a:srgbClr val="34D399"/>
+                </a:solidFill>
+                <a:latin typeface="Avenir Next"/>
+              </a:rPr>
+              <a:t>An </a:t>
+            </a:r>
+            <a:r>
+              <a:rPr lang="en-US" b="1" dirty="0">
+                <a:solidFill>
+                  <a:srgbClr val="34D399"/>
+                </a:solidFill>
+                <a:latin typeface="Avenir Next"/>
+              </a:rPr>
+              <a:t>intelligence layer that turns Vietnam's wasted rooftop solar into firm clean power</a:t>
+            </a:r>
+            <a:endParaRPr lang="en-VN" b="1" dirty="0">
+              <a:solidFill>
+                <a:srgbClr val="34D399"/>
+              </a:solidFill>
+              <a:latin typeface="Avenir Next"/>
+            </a:endParaRPr>
+          </a:p>
           <a:p>
             <a:pPr algn="l">
               <a:spcAft>
                 <a:spcPts val="600"/>
               </a:spcAft>
             </a:pPr>
-            <a:r>
-              <a:rPr sz="1800" b="1">
-                <a:solidFill>
-                  <a:srgbClr val="34D399"/>
-                </a:solidFill>
-                <a:latin typeface="Avenir Next"/>
-              </a:rPr>
-              <a:t>Sun-to-Wheels today. Sun-to-Servers next.</a:t>
-            </a:r>
+            <a:endParaRPr sz="1800" b="1" dirty="0">
+              <a:solidFill>
+                <a:srgbClr val="34D399"/>
+              </a:solidFill>
+              <a:latin typeface="Avenir Next"/>
+            </a:endParaRPr>
           </a:p>
         </p:txBody>
       </p:sp>
@@ -6197,7 +6302,7 @@
               </a:spcAft>
             </a:pPr>
             <a:r>
-              <a:rPr sz="1500" b="1">
+              <a:rPr sz="1500" b="1" dirty="0">
                 <a:solidFill>
                   <a:srgbClr val="34D399"/>
                 </a:solidFill>
@@ -6206,7 +6311,7 @@
               <a:t>▸ </a:t>
             </a:r>
             <a:r>
-              <a:rPr sz="1500" b="1">
+              <a:rPr sz="1500" b="1" dirty="0">
                 <a:solidFill>
                   <a:srgbClr val="E2E8F0"/>
                 </a:solidFill>
@@ -6215,7 +6320,7 @@
               <a:t>EVN: </a:t>
             </a:r>
             <a:r>
-              <a:rPr sz="1500" b="0">
+              <a:rPr sz="1500" b="0" dirty="0">
                 <a:solidFill>
                   <a:srgbClr val="E2E8F0"/>
                 </a:solidFill>
@@ -6231,7 +6336,7 @@
               </a:spcAft>
             </a:pPr>
             <a:r>
-              <a:rPr sz="1500" b="1">
+              <a:rPr sz="1500" b="1" dirty="0">
                 <a:solidFill>
                   <a:srgbClr val="34D399"/>
                 </a:solidFill>
@@ -6240,7 +6345,7 @@
               <a:t>▸ </a:t>
             </a:r>
             <a:r>
-              <a:rPr sz="1500" b="1">
+              <a:rPr sz="1500" b="1" dirty="0">
                 <a:solidFill>
                   <a:srgbClr val="E2E8F0"/>
                 </a:solidFill>
@@ -6249,7 +6354,7 @@
               <a:t>National scenario 2030: </a:t>
             </a:r>
             <a:r>
-              <a:rPr sz="1500" b="0">
+              <a:rPr sz="1500" b="0" dirty="0">
                 <a:solidFill>
                   <a:srgbClr val="E2E8F0"/>
                 </a:solidFill>
@@ -6265,7 +6370,7 @@
               </a:spcAft>
             </a:pPr>
             <a:r>
-              <a:rPr sz="1500" b="1">
+              <a:rPr sz="1500" b="1" dirty="0">
                 <a:solidFill>
                   <a:srgbClr val="34D399"/>
                 </a:solidFill>
@@ -6274,7 +6379,7 @@
               <a:t>▸ </a:t>
             </a:r>
             <a:r>
-              <a:rPr sz="1500" b="1">
+              <a:rPr sz="1500" b="1" dirty="0">
                 <a:solidFill>
                   <a:srgbClr val="E2E8F0"/>
                 </a:solidFill>
@@ -6283,7 +6388,7 @@
               <a:t>Every assumption is a slider </a:t>
             </a:r>
             <a:r>
-              <a:rPr sz="1500" b="0">
+              <a:rPr sz="1500" b="0" dirty="0">
                 <a:solidFill>
                   <a:srgbClr val="E2E8F0"/>
                 </a:solidFill>
@@ -6535,7 +6640,7 @@
         <p:spPr>
           <a:xfrm>
             <a:off x="548640" y="1417320"/>
-            <a:ext cx="11064240" cy="457200"/>
+            <a:ext cx="11064240" cy="323165"/>
           </a:xfrm>
           <a:prstGeom prst="rect">
             <a:avLst/>
@@ -6554,13 +6659,13 @@
               </a:spcAft>
             </a:pPr>
             <a:r>
-              <a:rPr sz="1500" b="1">
+              <a:rPr sz="1500" b="1" dirty="0">
                 <a:solidFill>
                   <a:srgbClr val="FBBF24"/>
                 </a:solidFill>
                 <a:latin typeface="Avenir Next"/>
               </a:rPr>
-              <a:t>USP: legal today (Decrees 58 &amp; 57/2025, VND rails) · zero new household hardware · explainable to a grandmother</a:t>
+              <a:t>USP: legal today (Decrees 58 &amp; 57/2025, VND rails) · zero new household hardware</a:t>
             </a:r>
           </a:p>
         </p:txBody>
@@ -7947,7 +8052,7 @@
               </a:spcAft>
             </a:pPr>
             <a:r>
-              <a:rPr sz="2800" b="1">
+              <a:rPr sz="2800" b="1" dirty="0">
                 <a:solidFill>
                   <a:srgbClr val="34D399"/>
                 </a:solidFill>
@@ -8612,7 +8717,7 @@
                 </a:solidFill>
                 <a:latin typeface="Avenir Next"/>
               </a:rPr>
-              <a:t>real Hanoi weather, held-out metrics on screen, every decision explained in one sentence.</a:t>
+              <a:t>real Hanoi weather, held-out metrics on screen.</a:t>
             </a:r>
           </a:p>
         </p:txBody>
@@ -8858,7 +8963,7 @@
         <p:spPr>
           <a:xfrm>
             <a:off x="548640" y="1783080"/>
-            <a:ext cx="11064240" cy="3566160"/>
+            <a:ext cx="11064240" cy="2600712"/>
           </a:xfrm>
           <a:prstGeom prst="rect">
             <a:avLst/>
@@ -8877,7 +8982,7 @@
               </a:spcAft>
             </a:pPr>
             <a:r>
-              <a:rPr sz="1600" b="1">
+              <a:rPr sz="1600" b="1" dirty="0">
                 <a:solidFill>
                   <a:srgbClr val="34D399"/>
                 </a:solidFill>
@@ -8886,7 +8991,7 @@
               <a:t>▸ </a:t>
             </a:r>
             <a:r>
-              <a:rPr sz="1600" b="1">
+              <a:rPr sz="1600" b="1" dirty="0">
                 <a:solidFill>
                   <a:srgbClr val="E2E8F0"/>
                 </a:solidFill>
@@ -8895,13 +9000,31 @@
               <a:t>1 Jul 2026 — Hanoi LEZ is live: </a:t>
             </a:r>
             <a:r>
-              <a:rPr sz="1600" b="0">
+              <a:rPr sz="1600" b="0" dirty="0">
                 <a:solidFill>
                   <a:srgbClr val="E2E8F0"/>
                 </a:solidFill>
                 <a:latin typeface="Avenir Next"/>
               </a:rPr>
-              <a:t>450,000 petrol bikes to replace; charging habits crystallise in the next 24 months — retrofitting coordination later is far harder.</a:t>
+              <a:t>450,000 petrol bikes to replace; charging habits </a:t>
+            </a:r>
+            <a:r>
+              <a:rPr sz="1600" b="0" dirty="0" err="1">
+                <a:solidFill>
+                  <a:srgbClr val="E2E8F0"/>
+                </a:solidFill>
+                <a:latin typeface="Avenir Next"/>
+              </a:rPr>
+              <a:t>crystallise</a:t>
+            </a:r>
+            <a:r>
+              <a:rPr sz="1600" b="0" dirty="0">
+                <a:solidFill>
+                  <a:srgbClr val="E2E8F0"/>
+                </a:solidFill>
+                <a:latin typeface="Avenir Next"/>
+              </a:rPr>
+              <a:t> in the next 24 months — retrofitting coordination later is far harder.</a:t>
             </a:r>
           </a:p>
           <a:p>
@@ -8911,7 +9034,7 @@
               </a:spcAft>
             </a:pPr>
             <a:r>
-              <a:rPr sz="1600" b="1">
+              <a:rPr sz="1600" b="1" dirty="0">
                 <a:solidFill>
                   <a:srgbClr val="34D399"/>
                 </a:solidFill>
@@ -8920,7 +9043,7 @@
               <a:t>▸ </a:t>
             </a:r>
             <a:r>
-              <a:rPr sz="1600" b="1">
+              <a:rPr sz="1600" b="1" dirty="0">
                 <a:solidFill>
                   <a:srgbClr val="E2E8F0"/>
                 </a:solidFill>
@@ -8929,7 +9052,7 @@
               <a:t>26 Jun 2026 — surplus-sale cap 20% → 50%: </a:t>
             </a:r>
             <a:r>
-              <a:rPr sz="1600" b="0">
+              <a:rPr sz="1600" b="0" dirty="0">
                 <a:solidFill>
                   <a:srgbClr val="E2E8F0"/>
                 </a:solidFill>
@@ -8945,7 +9068,7 @@
               </a:spcAft>
             </a:pPr>
             <a:r>
-              <a:rPr sz="1600" b="1">
+              <a:rPr sz="1600" b="1" dirty="0">
                 <a:solidFill>
                   <a:srgbClr val="34D399"/>
                 </a:solidFill>
@@ -8954,22 +9077,58 @@
               <a:t>▸ </a:t>
             </a:r>
             <a:r>
-              <a:rPr sz="1600" b="1">
+              <a:rPr sz="1600" b="1" dirty="0">
                 <a:solidFill>
                   <a:srgbClr val="E2E8F0"/>
                 </a:solidFill>
                 <a:latin typeface="Avenir Next"/>
               </a:rPr>
-              <a:t>Jan 2026 — data-localisation law: </a:t>
-            </a:r>
-            <a:r>
-              <a:rPr sz="1600" b="0">
+              <a:t>Jan 2026 — data-</a:t>
+            </a:r>
+            <a:r>
+              <a:rPr sz="1600" b="1" dirty="0" err="1">
                 <a:solidFill>
                   <a:srgbClr val="E2E8F0"/>
                 </a:solidFill>
                 <a:latin typeface="Avenir Next"/>
               </a:rPr>
-              <a:t>domestic data-centre build-out accelerates (735 MW → ~1,500 MW by 2030), mandated ≥50% green — buyers for firm clean blocks.</a:t>
+              <a:t>localisation</a:t>
+            </a:r>
+            <a:r>
+              <a:rPr sz="1600" b="1" dirty="0">
+                <a:solidFill>
+                  <a:srgbClr val="E2E8F0"/>
+                </a:solidFill>
+                <a:latin typeface="Avenir Next"/>
+              </a:rPr>
+              <a:t> law: </a:t>
+            </a:r>
+            <a:r>
+              <a:rPr sz="1600" b="0" dirty="0">
+                <a:solidFill>
+                  <a:srgbClr val="E2E8F0"/>
+                </a:solidFill>
+                <a:latin typeface="Avenir Next"/>
+              </a:rPr>
+              <a:t>domestic data-cent</a:t>
+            </a:r>
+            <a:r>
+              <a:rPr lang="en-US" sz="1600" b="0" dirty="0">
+                <a:solidFill>
+                  <a:srgbClr val="E2E8F0"/>
+                </a:solidFill>
+                <a:latin typeface="Avenir Next"/>
+              </a:rPr>
+              <a:t>er</a:t>
+            </a:r>
+            <a:r>
+              <a:rPr sz="1600" b="0" dirty="0">
+                <a:solidFill>
+                  <a:srgbClr val="E2E8F0"/>
+                </a:solidFill>
+                <a:latin typeface="Avenir Next"/>
+              </a:rPr>
+              <a:t> build-out accelerates (735 MW → ~1,500 MW by 2030), mandated ≥50% green — buyers for firm clean blocks.</a:t>
             </a:r>
           </a:p>
           <a:p>
@@ -8979,7 +9138,7 @@
               </a:spcAft>
             </a:pPr>
             <a:r>
-              <a:rPr sz="1600" b="1">
+              <a:rPr sz="1600" b="1" dirty="0">
                 <a:solidFill>
                   <a:srgbClr val="34D399"/>
                 </a:solidFill>
@@ -8988,16 +9147,25 @@
               <a:t>▸ </a:t>
             </a:r>
             <a:r>
-              <a:rPr sz="1600" b="1">
+              <a:rPr sz="1600" b="1" dirty="0">
                 <a:solidFill>
                   <a:srgbClr val="E2E8F0"/>
                 </a:solidFill>
                 <a:latin typeface="Avenir Next"/>
               </a:rPr>
-              <a:t>2030–2035 — earliest nuclear (Ninh Thuận 1): </a:t>
-            </a:r>
-            <a:r>
-              <a:rPr sz="1600" b="0">
+              <a:t>2030–2035 — earliest nuclear</a:t>
+            </a:r>
+            <a:r>
+              <a:rPr lang="en-US" sz="1600" b="1" dirty="0">
+                <a:solidFill>
+                  <a:srgbClr val="E2E8F0"/>
+                </a:solidFill>
+                <a:latin typeface="Avenir Next"/>
+              </a:rPr>
+              <a:t>: </a:t>
+            </a:r>
+            <a:r>
+              <a:rPr sz="1600" b="0" dirty="0">
                 <a:solidFill>
                   <a:srgbClr val="E2E8F0"/>
                 </a:solidFill>
